--- a/presentations/overview-mechanisms-reference.pptx
+++ b/presentations/overview-mechanisms-reference.pptx
@@ -601,16 +601,6 @@
           </a:p>
           <a:p>
             <a:r>
-              <a:t>Memory</a:t>
-            </a:r>
-          </a:p>
-          <a:p>
-            <a:r>
-              <a:t>https://kiro.dev/docs/memory/</a:t>
-            </a:r>
-          </a:p>
-          <a:p>
-            <a:r>
               <a:t>Create a penetration test</a:t>
             </a:r>
           </a:p>
@@ -641,16 +631,6 @@
           </a:p>
           <a:p>
             <a:r>
-              <a:t>MCP tool approval</a:t>
-            </a:r>
-          </a:p>
-          <a:p>
-            <a:r>
-              <a:t>https://kiro.dev/docs/mcp/usage/</a:t>
-            </a:r>
-          </a:p>
-          <a:p>
-            <a:r>
               <a:t>Provide authentication credentials</a:t>
             </a:r>
           </a:p>
@@ -701,16 +681,6 @@
           </a:p>
           <a:p>
             <a:r>
-              <a:t>Working with the agent on Web</a:t>
-            </a:r>
-          </a:p>
-          <a:p>
-            <a:r>
-              <a:t>https://kiro.dev/docs/web/using-the-agent/</a:t>
-            </a:r>
-          </a:p>
-          <a:p>
-            <a:r>
               <a:t>Security considerations and finding validation</a:t>
             </a:r>
           </a:p>
@@ -747,36 +717,6 @@
           <a:p>
             <a:r>
               <a:t>https://docs.aws.amazon.com/devopsagent/latest/userguide/about-aws-devops-agent-learned-skills.html</a:t>
-            </a:r>
-          </a:p>
-          <a:p>
-            <a:r>
-              <a:t>Introducing memory in Kiro IDE and CLI — 20 October 2026</a:t>
-            </a:r>
-          </a:p>
-          <a:p>
-            <a:r>
-              <a:t>https://kiro.dev/blog/memory-in-ide-cli/</a:t>
-            </a:r>
-          </a:p>
-          <a:p>
-            <a:r>
-              <a:t>Run code security scans from an IDE</a:t>
-            </a:r>
-          </a:p>
-          <a:p>
-            <a:r>
-              <a:t>https://docs.aws.amazon.com/securityagent/latest/userguide/code-review-ide-integration.html</a:t>
-            </a:r>
-          </a:p>
-          <a:p>
-            <a:r>
-              <a:t>MCP configuration</a:t>
-            </a:r>
-          </a:p>
-          <a:p>
-            <a:r>
-              <a:t>https://kiro.dev/docs/mcp/configuration/</a:t>
             </a:r>
           </a:p>
           <a:p/>
@@ -894,7 +834,7 @@
           <a:p/>
           <a:p>
             <a:r>
-              <a:t>**Surface:** Across the four products; implementation differs</a:t>
+              <a:t>**Surface:** Across the three products; implementation differs</a:t>
             </a:r>
           </a:p>
           <a:p/>
@@ -1039,12 +979,6 @@
           <a:p>
             <a:r>
               <a:t>[DM: DevOps Agent Memories](https://docs.aws.amazon.com/devopsagent/latest/userguide/about-aws-devops-agent-devops-agent-memories.html)</a:t>
-            </a:r>
-          </a:p>
-          <a:p/>
-          <a:p>
-            <a:r>
-              <a:t>[KM: Memory](https://kiro.dev/docs/memory/)</a:t>
             </a:r>
           </a:p>
           <a:p/>
@@ -1170,7 +1104,7 @@
           <a:p/>
           <a:p>
             <a:r>
-              <a:t>**Surface:** Across the four products; implementation differs</a:t>
+              <a:t>**Surface:** Across the three products; implementation differs</a:t>
             </a:r>
           </a:p>
           <a:p/>
@@ -1315,12 +1249,6 @@
           <a:p>
             <a:r>
               <a:t>[DA: Limiting agent access in an AWS account](https://docs.aws.amazon.com/devopsagent/latest/userguide/aws-devops-agent-security-limiting-agent-access-in-an-aws-account.html)</a:t>
-            </a:r>
-          </a:p>
-          <a:p/>
-          <a:p>
-            <a:r>
-              <a:t>[KP: MCP tool approval](https://kiro.dev/docs/mcp/usage/)</a:t>
             </a:r>
           </a:p>
           <a:p/>
@@ -1446,7 +1374,7 @@
           <a:p/>
           <a:p>
             <a:r>
-              <a:t>**Surface:** Across the four products; implementation differs</a:t>
+              <a:t>**Surface:** Across the three products; implementation differs</a:t>
             </a:r>
           </a:p>
           <a:p/>
@@ -1591,12 +1519,6 @@
           <a:p>
             <a:r>
               <a:t>[DC: Creating a custom agent](https://docs.aws.amazon.com/devopsagent/latest/userguide/custom-agents-creating-a-custom-agent.html)</a:t>
-            </a:r>
-          </a:p>
-          <a:p/>
-          <a:p>
-            <a:r>
-              <a:t>[KM: Memory](https://kiro.dev/docs/memory/)</a:t>
             </a:r>
           </a:p>
           <a:p/>
@@ -1722,7 +1644,7 @@
           <a:p/>
           <a:p>
             <a:r>
-              <a:t>**Surface:** Across the four products; implementation differs</a:t>
+              <a:t>**Surface:** Across the three products; implementation differs</a:t>
             </a:r>
           </a:p>
           <a:p/>
@@ -1867,12 +1789,6 @@
           <a:p>
             <a:r>
               <a:t>[DM: DevOps Agent Memories](https://docs.aws.amazon.com/devopsagent/latest/userguide/about-aws-devops-agent-devops-agent-memories.html)</a:t>
-            </a:r>
-          </a:p>
-          <a:p/>
-          <a:p>
-            <a:r>
-              <a:t>[KW: Working with the agent on Web](https://kiro.dev/docs/web/using-the-agent/)</a:t>
             </a:r>
           </a:p>
           <a:p/>
@@ -1998,7 +1914,7 @@
           <a:p/>
           <a:p>
             <a:r>
-              <a:t>**Surface:** Across the four products; implementation differs</a:t>
+              <a:t>**Surface:** Across the three products; implementation differs</a:t>
             </a:r>
           </a:p>
           <a:p/>
@@ -2143,12 +2059,6 @@
           <a:p>
             <a:r>
               <a:t>[DM: DevOps Agent Memories](https://docs.aws.amazon.com/devopsagent/latest/userguide/about-aws-devops-agent-devops-agent-memories.html)</a:t>
-            </a:r>
-          </a:p>
-          <a:p/>
-          <a:p>
-            <a:r>
-              <a:t>[KM: Memory](https://kiro.dev/docs/memory/)</a:t>
             </a:r>
           </a:p>
           <a:p/>
@@ -2274,7 +2184,7 @@
           <a:p/>
           <a:p>
             <a:r>
-              <a:t>**Surface:** Across the four products; implementation differs</a:t>
+              <a:t>**Surface:** Across the three products; implementation differs</a:t>
             </a:r>
           </a:p>
           <a:p/>
@@ -2419,24 +2329,6 @@
           <a:p>
             <a:r>
               <a:t>[DL: Learned Skills: migration to memory](https://docs.aws.amazon.com/devopsagent/latest/userguide/about-aws-devops-agent-learned-skills.html)</a:t>
-            </a:r>
-          </a:p>
-          <a:p/>
-          <a:p>
-            <a:r>
-              <a:t>[KL: Introducing memory in Kiro IDE and CLI — 20 October 2026](https://kiro.dev/blog/memory-in-ide-cli/)</a:t>
-            </a:r>
-          </a:p>
-          <a:p/>
-          <a:p>
-            <a:r>
-              <a:t>[SI: Run code security scans from an IDE](https://docs.aws.amazon.com/securityagent/latest/userguide/code-review-ide-integration.html)</a:t>
-            </a:r>
-          </a:p>
-          <a:p/>
-          <a:p>
-            <a:r>
-              <a:t>[KC: MCP configuration](https://kiro.dev/docs/mcp/configuration/)</a:t>
             </a:r>
           </a:p>
           <a:p/>
@@ -6409,7 +6301,7 @@
               <a:rPr>
                 <a:hlinkClick r:id="rId4"/>
               </a:rPr>
-              <a:t>[KM] Memory</a:t>
+              <a:t>[SC] Create a penetration test</a:t>
             </a:r>
           </a:p>
         </p:txBody>
@@ -6451,7 +6343,7 @@
               <a:rPr>
                 <a:hlinkClick r:id="rId5"/>
               </a:rPr>
-              <a:t>[SC] Create a penetration test</a:t>
+              <a:t>[FP] Data protection</a:t>
             </a:r>
           </a:p>
         </p:txBody>
@@ -6493,7 +6385,7 @@
               <a:rPr>
                 <a:hlinkClick r:id="rId6"/>
               </a:rPr>
-              <a:t>[FP] Data protection</a:t>
+              <a:t>[DA] Limiting agent access in an AWS account</a:t>
             </a:r>
           </a:p>
         </p:txBody>
@@ -6535,7 +6427,7 @@
               <a:rPr>
                 <a:hlinkClick r:id="rId7"/>
               </a:rPr>
-              <a:t>[DA] Limiting agent access in an AWS account</a:t>
+              <a:t>[SA] Provide authentication credentials</a:t>
             </a:r>
           </a:p>
         </p:txBody>
@@ -6577,7 +6469,7 @@
               <a:rPr>
                 <a:hlinkClick r:id="rId8"/>
               </a:rPr>
-              <a:t>[KP] MCP tool approval</a:t>
+              <a:t>[FG] Agent guardrail controls</a:t>
             </a:r>
           </a:p>
         </p:txBody>
@@ -6619,7 +6511,7 @@
               <a:rPr>
                 <a:hlinkClick r:id="rId9"/>
               </a:rPr>
-              <a:t>[SA] Provide authentication credentials</a:t>
+              <a:t>[DC] Creating a custom agent</a:t>
             </a:r>
           </a:p>
         </p:txBody>
@@ -6661,7 +6553,7 @@
               <a:rPr>
                 <a:hlinkClick r:id="rId10"/>
               </a:rPr>
-              <a:t>[FG] Agent guardrail controls</a:t>
+              <a:t>[SP] Manage security requirements</a:t>
             </a:r>
           </a:p>
         </p:txBody>
@@ -6703,7 +6595,7 @@
               <a:rPr>
                 <a:hlinkClick r:id="rId11"/>
               </a:rPr>
-              <a:t>[DC] Creating a custom agent</a:t>
+              <a:t>[FT] Task management</a:t>
             </a:r>
           </a:p>
         </p:txBody>
@@ -6745,7 +6637,7 @@
               <a:rPr>
                 <a:hlinkClick r:id="rId12"/>
               </a:rPr>
-              <a:t>[SP] Manage security requirements</a:t>
+              <a:t>[SG] Security considerations and finding validation</a:t>
             </a:r>
           </a:p>
         </p:txBody>
@@ -6787,7 +6679,7 @@
               <a:rPr>
                 <a:hlinkClick r:id="rId13"/>
               </a:rPr>
-              <a:t>[FT] Task management</a:t>
+              <a:t>[FD] Cost inquiry and data-source access</a:t>
             </a:r>
           </a:p>
         </p:txBody>
@@ -6829,7 +6721,7 @@
               <a:rPr>
                 <a:hlinkClick r:id="rId14"/>
               </a:rPr>
-              <a:t>[KW] Working with the agent on Web</a:t>
+              <a:t>[ST] Revalidate penetration-test findings</a:t>
             </a:r>
           </a:p>
         </p:txBody>
@@ -6871,7 +6763,7 @@
               <a:rPr>
                 <a:hlinkClick r:id="rId15"/>
               </a:rPr>
-              <a:t>[SG] Security considerations and finding validation</a:t>
+              <a:t>[DL] Learned Skills: migration to memory</a:t>
             </a:r>
           </a:p>
         </p:txBody>
@@ -6879,258 +6771,6 @@
       <p:sp>
         <p:nvSpPr>
           <p:cNvPr id="22" name="TextBox 21"/>
-          <p:cNvSpPr txBox="1"/>
-          <p:nvPr/>
-        </p:nvSpPr>
-        <p:spPr>
-          <a:xfrm>
-            <a:off x="6263640" y="4590288"/>
-            <a:ext cx="5394960" cy="283464"/>
-          </a:xfrm>
-          <a:prstGeom prst="rect">
-            <a:avLst/>
-          </a:prstGeom>
-          <a:noFill/>
-        </p:spPr>
-        <p:txBody>
-          <a:bodyPr wrap="square" lIns="0" rIns="0" tIns="0" bIns="0">
-            <a:spAutoFit/>
-          </a:bodyPr>
-          <a:lstStyle/>
-          <a:p>
-            <a:pPr>
-              <a:spcAft>
-                <a:spcPts val="600"/>
-              </a:spcAft>
-              <a:defRPr sz="1300" b="0">
-                <a:solidFill>
-                  <a:srgbClr val="176E83"/>
-                </a:solidFill>
-                <a:latin typeface="Aptos"/>
-              </a:defRPr>
-            </a:pPr>
-            <a:r>
-              <a:rPr>
-                <a:hlinkClick r:id="rId16"/>
-              </a:rPr>
-              <a:t>[FD] Cost inquiry and data-source access</a:t>
-            </a:r>
-          </a:p>
-        </p:txBody>
-      </p:sp>
-      <p:sp>
-        <p:nvSpPr>
-          <p:cNvPr id="23" name="TextBox 22"/>
-          <p:cNvSpPr txBox="1"/>
-          <p:nvPr/>
-        </p:nvSpPr>
-        <p:spPr>
-          <a:xfrm>
-            <a:off x="594360" y="4928616"/>
-            <a:ext cx="5394960" cy="283464"/>
-          </a:xfrm>
-          <a:prstGeom prst="rect">
-            <a:avLst/>
-          </a:prstGeom>
-          <a:noFill/>
-        </p:spPr>
-        <p:txBody>
-          <a:bodyPr wrap="square" lIns="0" rIns="0" tIns="0" bIns="0">
-            <a:spAutoFit/>
-          </a:bodyPr>
-          <a:lstStyle/>
-          <a:p>
-            <a:pPr>
-              <a:spcAft>
-                <a:spcPts val="600"/>
-              </a:spcAft>
-              <a:defRPr sz="1300" b="0">
-                <a:solidFill>
-                  <a:srgbClr val="176E83"/>
-                </a:solidFill>
-                <a:latin typeface="Aptos"/>
-              </a:defRPr>
-            </a:pPr>
-            <a:r>
-              <a:rPr>
-                <a:hlinkClick r:id="rId17"/>
-              </a:rPr>
-              <a:t>[ST] Revalidate penetration-test findings</a:t>
-            </a:r>
-          </a:p>
-        </p:txBody>
-      </p:sp>
-      <p:sp>
-        <p:nvSpPr>
-          <p:cNvPr id="24" name="TextBox 23"/>
-          <p:cNvSpPr txBox="1"/>
-          <p:nvPr/>
-        </p:nvSpPr>
-        <p:spPr>
-          <a:xfrm>
-            <a:off x="6263640" y="4928616"/>
-            <a:ext cx="5394960" cy="283464"/>
-          </a:xfrm>
-          <a:prstGeom prst="rect">
-            <a:avLst/>
-          </a:prstGeom>
-          <a:noFill/>
-        </p:spPr>
-        <p:txBody>
-          <a:bodyPr wrap="square" lIns="0" rIns="0" tIns="0" bIns="0">
-            <a:spAutoFit/>
-          </a:bodyPr>
-          <a:lstStyle/>
-          <a:p>
-            <a:pPr>
-              <a:spcAft>
-                <a:spcPts val="600"/>
-              </a:spcAft>
-              <a:defRPr sz="1300" b="0">
-                <a:solidFill>
-                  <a:srgbClr val="176E83"/>
-                </a:solidFill>
-                <a:latin typeface="Aptos"/>
-              </a:defRPr>
-            </a:pPr>
-            <a:r>
-              <a:rPr>
-                <a:hlinkClick r:id="rId18"/>
-              </a:rPr>
-              <a:t>[DL] Learned Skills: migration to memory</a:t>
-            </a:r>
-          </a:p>
-        </p:txBody>
-      </p:sp>
-      <p:sp>
-        <p:nvSpPr>
-          <p:cNvPr id="25" name="TextBox 24"/>
-          <p:cNvSpPr txBox="1"/>
-          <p:nvPr/>
-        </p:nvSpPr>
-        <p:spPr>
-          <a:xfrm>
-            <a:off x="594360" y="5266944"/>
-            <a:ext cx="5394960" cy="283464"/>
-          </a:xfrm>
-          <a:prstGeom prst="rect">
-            <a:avLst/>
-          </a:prstGeom>
-          <a:noFill/>
-        </p:spPr>
-        <p:txBody>
-          <a:bodyPr wrap="square" lIns="0" rIns="0" tIns="0" bIns="0">
-            <a:spAutoFit/>
-          </a:bodyPr>
-          <a:lstStyle/>
-          <a:p>
-            <a:pPr>
-              <a:spcAft>
-                <a:spcPts val="600"/>
-              </a:spcAft>
-              <a:defRPr sz="1300" b="0">
-                <a:solidFill>
-                  <a:srgbClr val="176E83"/>
-                </a:solidFill>
-                <a:latin typeface="Aptos"/>
-              </a:defRPr>
-            </a:pPr>
-            <a:r>
-              <a:rPr>
-                <a:hlinkClick r:id="rId19"/>
-              </a:rPr>
-              <a:t>[KL] Introducing memory in Kiro IDE and CLI — 20 October 2026</a:t>
-            </a:r>
-          </a:p>
-        </p:txBody>
-      </p:sp>
-      <p:sp>
-        <p:nvSpPr>
-          <p:cNvPr id="26" name="TextBox 25"/>
-          <p:cNvSpPr txBox="1"/>
-          <p:nvPr/>
-        </p:nvSpPr>
-        <p:spPr>
-          <a:xfrm>
-            <a:off x="6263640" y="5266944"/>
-            <a:ext cx="5394960" cy="283464"/>
-          </a:xfrm>
-          <a:prstGeom prst="rect">
-            <a:avLst/>
-          </a:prstGeom>
-          <a:noFill/>
-        </p:spPr>
-        <p:txBody>
-          <a:bodyPr wrap="square" lIns="0" rIns="0" tIns="0" bIns="0">
-            <a:spAutoFit/>
-          </a:bodyPr>
-          <a:lstStyle/>
-          <a:p>
-            <a:pPr>
-              <a:spcAft>
-                <a:spcPts val="600"/>
-              </a:spcAft>
-              <a:defRPr sz="1300" b="0">
-                <a:solidFill>
-                  <a:srgbClr val="176E83"/>
-                </a:solidFill>
-                <a:latin typeface="Aptos"/>
-              </a:defRPr>
-            </a:pPr>
-            <a:r>
-              <a:rPr>
-                <a:hlinkClick r:id="rId20"/>
-              </a:rPr>
-              <a:t>[SI] Run code security scans from an IDE</a:t>
-            </a:r>
-          </a:p>
-        </p:txBody>
-      </p:sp>
-      <p:sp>
-        <p:nvSpPr>
-          <p:cNvPr id="27" name="TextBox 26"/>
-          <p:cNvSpPr txBox="1"/>
-          <p:nvPr/>
-        </p:nvSpPr>
-        <p:spPr>
-          <a:xfrm>
-            <a:off x="594360" y="5605272"/>
-            <a:ext cx="5394960" cy="283464"/>
-          </a:xfrm>
-          <a:prstGeom prst="rect">
-            <a:avLst/>
-          </a:prstGeom>
-          <a:noFill/>
-        </p:spPr>
-        <p:txBody>
-          <a:bodyPr wrap="square" lIns="0" rIns="0" tIns="0" bIns="0">
-            <a:spAutoFit/>
-          </a:bodyPr>
-          <a:lstStyle/>
-          <a:p>
-            <a:pPr>
-              <a:spcAft>
-                <a:spcPts val="600"/>
-              </a:spcAft>
-              <a:defRPr sz="1300" b="0">
-                <a:solidFill>
-                  <a:srgbClr val="176E83"/>
-                </a:solidFill>
-                <a:latin typeface="Aptos"/>
-              </a:defRPr>
-            </a:pPr>
-            <a:r>
-              <a:rPr>
-                <a:hlinkClick r:id="rId21"/>
-              </a:rPr>
-              <a:t>[KC] MCP configuration</a:t>
-            </a:r>
-          </a:p>
-        </p:txBody>
-      </p:sp>
-      <p:sp>
-        <p:nvSpPr>
-          <p:cNvPr id="28" name="TextBox 27"/>
           <p:cNvSpPr txBox="1"/>
           <p:nvPr/>
         </p:nvSpPr>
@@ -7985,7 +7625,7 @@
               </a:defRPr>
             </a:pPr>
             <a:r>
-              <a:t>Official sources: DM, KM, SC, FP · Across the four products; implementation differs</a:t>
+              <a:t>Official sources: DM, SC, FP · Across the three products; implementation differs</a:t>
             </a:r>
           </a:p>
         </p:txBody>
@@ -8808,7 +8448,7 @@
               </a:defRPr>
             </a:pPr>
             <a:r>
-              <a:t>Official sources: DA, KP, SA, FG · Across the four products; implementation differs</a:t>
+              <a:t>Official sources: DA, SA, FG · Across the three products; implementation differs</a:t>
             </a:r>
           </a:p>
         </p:txBody>
@@ -9631,7 +9271,7 @@
               </a:defRPr>
             </a:pPr>
             <a:r>
-              <a:t>Official sources: DC, KM, SP, FT · Across the four products; implementation differs</a:t>
+              <a:t>Official sources: DC, SP, FT · Across the three products; implementation differs</a:t>
             </a:r>
           </a:p>
         </p:txBody>
@@ -10454,7 +10094,7 @@
               </a:defRPr>
             </a:pPr>
             <a:r>
-              <a:t>Official sources: DM, KW, SG, FD · Across the four products; implementation differs</a:t>
+              <a:t>Official sources: DM, SG, FD · Across the three products; implementation differs</a:t>
             </a:r>
           </a:p>
         </p:txBody>
@@ -11277,7 +10917,7 @@
               </a:defRPr>
             </a:pPr>
             <a:r>
-              <a:t>Official sources: DM, KM, ST, FP · Across the four products; implementation differs</a:t>
+              <a:t>Official sources: DM, ST, FP · Across the three products; implementation differs</a:t>
             </a:r>
           </a:p>
         </p:txBody>
@@ -12100,7 +11740,7 @@
               </a:defRPr>
             </a:pPr>
             <a:r>
-              <a:t>Official sources: DL, KL, SI, KC · Across the four products; implementation differs</a:t>
+              <a:t>Official sources: DL · Across the three products; implementation differs</a:t>
             </a:r>
           </a:p>
         </p:txBody>
